--- a/presentations/b05-devices/B05_Devices.pptx
+++ b/presentations/b05-devices/B05_Devices.pptx
@@ -119,26 +119,26 @@
   <p:extLst>
     <p:ext uri="{521415D9-36F7-43E2-AB2F-B90AF26B5E84}">
       <p14:sectionLst xmlns:p14="http://schemas.microsoft.com/office/powerpoint/2010/main">
-        <p14:section name="Why Group Policy" id="{442189c1-451d-0521-583b-5ebbd9a2e980}">
+        <p14:section name="Why Group Policy" id="{e15fd82f-5080-8bac-e7e5-41428f0be542}">
           <p14:sldIdLst>
             <p14:sldId id="256"/>
             <p14:sldId id="257"/>
             <p14:sldId id="258"/>
           </p14:sldIdLst>
         </p14:section>
-        <p14:section name="What replaces it" id="{3843678c-8e6f-efb4-c565-014b272eedb4}">
+        <p14:section name="What replaces it" id="{fd55e4d2-5101-ba43-2ecd-a543b10d8e8d}">
           <p14:sldIdLst>
             <p14:sldId id="259"/>
             <p14:sldId id="260"/>
             <p14:sldId id="261"/>
           </p14:sldIdLst>
         </p14:section>
-        <p14:section name="Who owns it" id="{6f236550-07d9-6d17-ffc7-496fd70de620}">
+        <p14:section name="Who owns it" id="{4be41e7d-f600-efc9-e80a-85713d869f44}">
           <p14:sldIdLst>
             <p14:sldId id="262"/>
           </p14:sldIdLst>
         </p14:section>
-        <p14:section name="How to do it" id="{89bea83d-b49d-07bd-3476-a4fd3f5b036d}">
+        <p14:section name="How to do it" id="{705adbef-6657-e232-85b8-64d69fff1eca}">
           <p14:sldIdLst>
             <p14:sldId id="263"/>
             <p14:sldId id="264"/>
@@ -146,7 +146,7 @@
             <p14:sldId id="266"/>
           </p14:sldIdLst>
         </p14:section>
-        <p14:section name="Backup" id="{5904257d-9132-800d-def1-8f9129e061ca}">
+        <p14:section name="Backup" id="{0e63da1b-ef40-62c3-4c30-57300953bec3}">
           <p14:sldIdLst>
             <p14:sldId id="267"/>
             <p14:sldId id="268"/>
@@ -556,7 +556,7 @@
           <a:p>
             <a:r>
               <a:rPr lang="en-US" dirty="0"/>
-              <a:t>[0:00–0:27]  This briefing comes from Book 05 of the Modernization Workbook, Devices and Endpoints: the move from Group Policy to Intune for devices, and to Azure Arc for servers.
+              <a:t>[0:00–0:27]  This briefing comes from Book 05 of the Federal Modernization Workbook, Devices and Endpoints: the move from Group Policy to Intune for devices, and to Azure Arc for servers.
 I'll take it through four questions: why Group Policy can't simply be carried to the cloud, what replaces it, who owns the endpoint, and how to migrate a fleet without losing the governance Group Policy quietly provided.
 The short version: this is not a settings migration. It's a governance rebuild.
 Workbook: Book 05, index.</a:t>
@@ -1952,7 +1952,7 @@
                   <a:schemeClr val="accent5"/>
                 </a:solidFill>
               </a:rPr>
-              <a:t>Modernization Workbook  ·  Book 05 Devices &amp; Endpoints</a:t>
+              <a:t>Federal Modernization Workbook  ·  Book 05 Devices &amp; Endpoints</a:t>
             </a:r>
             <a:endParaRPr lang="en-US" sz="1000" dirty="0"/>
           </a:p>
@@ -2433,7 +2433,90 @@
       </p:sp>
       <p:sp>
         <p:nvSpPr>
-          <p:cNvPr id="4" name="Agenda line"/>
+          <p:cNvPr id="4" name="Presenter"/>
+          <p:cNvSpPr txBox="1"/>
+          <p:nvPr/>
+        </p:nvSpPr>
+        <p:spPr>
+          <a:xfrm>
+            <a:off x="731520" y="5897880"/>
+            <a:ext cx="6858000" cy="365760"/>
+          </a:xfrm>
+          <a:prstGeom prst="rect">
+            <a:avLst/>
+          </a:prstGeom>
+          <a:noFill/>
+          <a:ln/>
+        </p:spPr>
+        <p:txBody>
+          <a:bodyPr wrap="square" lIns="0" tIns="0" rIns="0" bIns="0" rtlCol="0" anchor="ctr"/>
+          <a:lstStyle/>
+          <a:p>
+            <a:pPr indent="0" marL="0">
+              <a:buNone/>
+            </a:pPr>
+            <a:r>
+              <a:rPr lang="en-US" sz="1600" dirty="0">
+                <a:solidFill>
+                  <a:srgbClr val="64748B"/>
+                </a:solidFill>
+              </a:rPr>
+              <a:t>Presented by  </a:t>
+            </a:r>
+            <a:pPr indent="0" marL="0">
+              <a:buNone/>
+            </a:pPr>
+            <a:r>
+              <a:rPr lang="en-US" sz="1600" b="1" dirty="0">
+                <a:solidFill>
+                  <a:srgbClr val="1F2A44"/>
+                </a:solidFill>
+              </a:rPr>
+              <a:t>Michael F. Stratton</a:t>
+            </a:r>
+            <a:endParaRPr lang="en-US" sz="1600" dirty="0"/>
+          </a:p>
+        </p:txBody>
+      </p:sp>
+      <p:sp>
+        <p:nvSpPr>
+          <p:cNvPr id="5" name="Disclaimer"/>
+          <p:cNvSpPr txBox="1"/>
+          <p:nvPr/>
+        </p:nvSpPr>
+        <p:spPr>
+          <a:xfrm>
+            <a:off x="731520" y="6309360"/>
+            <a:ext cx="8686800" cy="274320"/>
+          </a:xfrm>
+          <a:prstGeom prst="rect">
+            <a:avLst/>
+          </a:prstGeom>
+          <a:noFill/>
+          <a:ln/>
+        </p:spPr>
+        <p:txBody>
+          <a:bodyPr wrap="square" lIns="0" tIns="0" rIns="0" bIns="0" rtlCol="0" anchor="ctr"/>
+          <a:lstStyle/>
+          <a:p>
+            <a:pPr indent="0" marL="0">
+              <a:buNone/>
+            </a:pPr>
+            <a:r>
+              <a:rPr lang="en-US" sz="1050" dirty="0">
+                <a:solidFill>
+                  <a:srgbClr val="64748B"/>
+                </a:solidFill>
+              </a:rPr>
+              <a:t>Not an official U.S. government publication. Independent technical analysis; not reviewed or endorsed by any federal agency.</a:t>
+            </a:r>
+            <a:endParaRPr lang="en-US" sz="1050" dirty="0"/>
+          </a:p>
+        </p:txBody>
+      </p:sp>
+      <p:sp>
+        <p:nvSpPr>
+          <p:cNvPr id="6" name="Agenda line"/>
           <p:cNvSpPr txBox="1"/>
           <p:nvPr/>
         </p:nvSpPr>
@@ -2535,7 +2618,7 @@
       </p:sp>
       <p:sp>
         <p:nvSpPr>
-          <p:cNvPr id="5" name="Series line"/>
+          <p:cNvPr id="7" name="Series line"/>
           <p:cNvSpPr txBox="1"/>
           <p:nvPr/>
         </p:nvSpPr>
@@ -2563,7 +2646,7 @@
                   <a:srgbClr val="1F2A44"/>
                 </a:solidFill>
               </a:rPr>
-              <a:t>Modernization Workbook</a:t>
+              <a:t>Federal Modernization Workbook</a:t>
             </a:r>
             <a:endParaRPr lang="en-US" sz="1600" dirty="0"/>
           </a:p>
@@ -2651,7 +2734,13 @@
       </p:sp>
       <p:sp>
         <p:nvSpPr>
-          <p:cNvPr id="3" name="Tag How"/>
+          <p:cNvPr id="3" name="Tag How" descr="">
+            <a:extLst>
+              <a:ext uri="{C183D7F6-B498-43B3-948B-1728B52AA6E4}">
+                <adec:decorative xmlns:adec="http://schemas.microsoft.com/office/drawing/2017/decorative" val="1"/>
+              </a:ext>
+            </a:extLst>
+          </p:cNvPr>
           <p:cNvSpPr/>
           <p:nvPr/>
         </p:nvSpPr>
@@ -2714,7 +2803,13 @@
       </p:sp>
       <p:sp>
         <p:nvSpPr>
-          <p:cNvPr id="5" name="Icon FaServer"/>
+          <p:cNvPr id="5" name="Icon FaServer" descr="">
+            <a:extLst>
+              <a:ext uri="{C183D7F6-B498-43B3-948B-1728B52AA6E4}">
+                <adec:decorative xmlns:adec="http://schemas.microsoft.com/office/drawing/2017/decorative" val="1"/>
+              </a:ext>
+            </a:extLst>
+          </p:cNvPr>
           <p:cNvSpPr/>
           <p:nvPr/>
         </p:nvSpPr>
@@ -2739,7 +2834,13 @@
       </p:sp>
       <p:pic>
         <p:nvPicPr>
-          <p:cNvPr id="6" name="Image 0" descr="C:\Users\whale\git\mwb-b05\presentations\_build\icons\FaServer.png">    </p:cNvPr>
+          <p:cNvPr id="6" name="Image 0" descr="">
+            <a:extLst>
+              <a:ext uri="{C183D7F6-B498-43B3-948B-1728B52AA6E4}">
+                <adec:decorative xmlns:adec="http://schemas.microsoft.com/office/drawing/2017/decorative" val="1"/>
+              </a:ext>
+            </a:extLst>
+          </p:cNvPr>
           <p:cNvPicPr>
             <a:picLocks noChangeAspect="1"/>
           </p:cNvPicPr>
@@ -2813,7 +2914,13 @@
       </p:sp>
       <p:sp>
         <p:nvSpPr>
-          <p:cNvPr id="8" name="Icon FaListCheck"/>
+          <p:cNvPr id="8" name="Icon FaListCheck" descr="">
+            <a:extLst>
+              <a:ext uri="{C183D7F6-B498-43B3-948B-1728B52AA6E4}">
+                <adec:decorative xmlns:adec="http://schemas.microsoft.com/office/drawing/2017/decorative" val="1"/>
+              </a:ext>
+            </a:extLst>
+          </p:cNvPr>
           <p:cNvSpPr/>
           <p:nvPr/>
         </p:nvSpPr>
@@ -2838,7 +2945,13 @@
       </p:sp>
       <p:pic>
         <p:nvPicPr>
-          <p:cNvPr id="9" name="Image 1" descr="C:\Users\whale\git\mwb-b05\presentations\_build\icons\FaListCheck.png">    </p:cNvPr>
+          <p:cNvPr id="9" name="Image 1" descr="">
+            <a:extLst>
+              <a:ext uri="{C183D7F6-B498-43B3-948B-1728B52AA6E4}">
+                <adec:decorative xmlns:adec="http://schemas.microsoft.com/office/drawing/2017/decorative" val="1"/>
+              </a:ext>
+            </a:extLst>
+          </p:cNvPr>
           <p:cNvPicPr>
             <a:picLocks noChangeAspect="1"/>
           </p:cNvPicPr>
@@ -2912,7 +3025,13 @@
       </p:sp>
       <p:sp>
         <p:nvSpPr>
-          <p:cNvPr id="11" name="Icon FaShieldHalved"/>
+          <p:cNvPr id="11" name="Icon FaShieldHalved" descr="">
+            <a:extLst>
+              <a:ext uri="{C183D7F6-B498-43B3-948B-1728B52AA6E4}">
+                <adec:decorative xmlns:adec="http://schemas.microsoft.com/office/drawing/2017/decorative" val="1"/>
+              </a:ext>
+            </a:extLst>
+          </p:cNvPr>
           <p:cNvSpPr/>
           <p:nvPr/>
         </p:nvSpPr>
@@ -2937,7 +3056,13 @@
       </p:sp>
       <p:pic>
         <p:nvPicPr>
-          <p:cNvPr id="12" name="Image 2" descr="C:\Users\whale\git\mwb-b05\presentations\_build\icons\FaShieldHalved.png">    </p:cNvPr>
+          <p:cNvPr id="12" name="Image 2" descr="">
+            <a:extLst>
+              <a:ext uri="{C183D7F6-B498-43B3-948B-1728B52AA6E4}">
+                <adec:decorative xmlns:adec="http://schemas.microsoft.com/office/drawing/2017/decorative" val="1"/>
+              </a:ext>
+            </a:extLst>
+          </p:cNvPr>
           <p:cNvPicPr>
             <a:picLocks noChangeAspect="1"/>
           </p:cNvPicPr>
@@ -3011,7 +3136,13 @@
       </p:sp>
       <p:sp>
         <p:nvSpPr>
-          <p:cNvPr id="14" name="Date 0"/>
+          <p:cNvPr id="14" name="Date 0" descr="">
+            <a:extLst>
+              <a:ext uri="{C183D7F6-B498-43B3-948B-1728B52AA6E4}">
+                <adec:decorative xmlns:adec="http://schemas.microsoft.com/office/drawing/2017/decorative" val="1"/>
+              </a:ext>
+            </a:extLst>
+          </p:cNvPr>
           <p:cNvSpPr/>
           <p:nvPr/>
         </p:nvSpPr>
@@ -3098,7 +3229,13 @@
       </p:sp>
       <p:sp>
         <p:nvSpPr>
-          <p:cNvPr id="16" name="Date 1"/>
+          <p:cNvPr id="16" name="Date 1" descr="">
+            <a:extLst>
+              <a:ext uri="{C183D7F6-B498-43B3-948B-1728B52AA6E4}">
+                <adec:decorative xmlns:adec="http://schemas.microsoft.com/office/drawing/2017/decorative" val="1"/>
+              </a:ext>
+            </a:extLst>
+          </p:cNvPr>
           <p:cNvSpPr/>
           <p:nvPr/>
         </p:nvSpPr>
@@ -3185,7 +3322,13 @@
       </p:sp>
       <p:sp>
         <p:nvSpPr>
-          <p:cNvPr id="18" name="Rollback"/>
+          <p:cNvPr id="18" name="Rollback" descr="">
+            <a:extLst>
+              <a:ext uri="{C183D7F6-B498-43B3-948B-1728B52AA6E4}">
+                <adec:decorative xmlns:adec="http://schemas.microsoft.com/office/drawing/2017/decorative" val="1"/>
+              </a:ext>
+            </a:extLst>
+          </p:cNvPr>
           <p:cNvSpPr/>
           <p:nvPr/>
         </p:nvSpPr>
@@ -3219,7 +3362,13 @@
       </p:sp>
       <p:sp>
         <p:nvSpPr>
-          <p:cNvPr id="19" name="Icon FaArrowsRotate"/>
+          <p:cNvPr id="19" name="Icon FaArrowsRotate" descr="">
+            <a:extLst>
+              <a:ext uri="{C183D7F6-B498-43B3-948B-1728B52AA6E4}">
+                <adec:decorative xmlns:adec="http://schemas.microsoft.com/office/drawing/2017/decorative" val="1"/>
+              </a:ext>
+            </a:extLst>
+          </p:cNvPr>
           <p:cNvSpPr/>
           <p:nvPr/>
         </p:nvSpPr>
@@ -3244,7 +3393,13 @@
       </p:sp>
       <p:pic>
         <p:nvPicPr>
-          <p:cNvPr id="20" name="Image 3" descr="C:\Users\whale\git\mwb-b05\presentations\_build\icons\FaArrowsRotate.png">    </p:cNvPr>
+          <p:cNvPr id="20" name="Image 3" descr="">
+            <a:extLst>
+              <a:ext uri="{C183D7F6-B498-43B3-948B-1728B52AA6E4}">
+                <adec:decorative xmlns:adec="http://schemas.microsoft.com/office/drawing/2017/decorative" val="1"/>
+              </a:ext>
+            </a:extLst>
+          </p:cNvPr>
           <p:cNvPicPr>
             <a:picLocks noChangeAspect="1"/>
           </p:cNvPicPr>
@@ -3462,7 +3617,13 @@
       </p:sp>
       <p:sp>
         <p:nvSpPr>
-          <p:cNvPr id="3" name="Tag How"/>
+          <p:cNvPr id="3" name="Tag How" descr="">
+            <a:extLst>
+              <a:ext uri="{C183D7F6-B498-43B3-948B-1728B52AA6E4}">
+                <adec:decorative xmlns:adec="http://schemas.microsoft.com/office/drawing/2017/decorative" val="1"/>
+              </a:ext>
+            </a:extLst>
+          </p:cNvPr>
           <p:cNvSpPr/>
           <p:nvPr/>
         </p:nvSpPr>
@@ -3673,7 +3834,13 @@
       </p:sp>
       <p:sp>
         <p:nvSpPr>
-          <p:cNvPr id="7" name="Ask box"/>
+          <p:cNvPr id="7" name="Ask box" descr="">
+            <a:extLst>
+              <a:ext uri="{C183D7F6-B498-43B3-948B-1728B52AA6E4}">
+                <adec:decorative xmlns:adec="http://schemas.microsoft.com/office/drawing/2017/decorative" val="1"/>
+              </a:ext>
+            </a:extLst>
+          </p:cNvPr>
           <p:cNvSpPr/>
           <p:nvPr/>
         </p:nvSpPr>
@@ -3707,7 +3874,13 @@
       </p:sp>
       <p:sp>
         <p:nvSpPr>
-          <p:cNvPr id="8" name="Icon FaUserCheck"/>
+          <p:cNvPr id="8" name="Icon FaUserCheck" descr="">
+            <a:extLst>
+              <a:ext uri="{C183D7F6-B498-43B3-948B-1728B52AA6E4}">
+                <adec:decorative xmlns:adec="http://schemas.microsoft.com/office/drawing/2017/decorative" val="1"/>
+              </a:ext>
+            </a:extLst>
+          </p:cNvPr>
           <p:cNvSpPr/>
           <p:nvPr/>
         </p:nvSpPr>
@@ -3732,7 +3905,13 @@
       </p:sp>
       <p:pic>
         <p:nvPicPr>
-          <p:cNvPr id="9" name="Image 0" descr="C:\Users\whale\git\mwb-b05\presentations\_build\icons\FaUserCheck.png">    </p:cNvPr>
+          <p:cNvPr id="9" name="Image 0" descr="">
+            <a:extLst>
+              <a:ext uri="{C183D7F6-B498-43B3-948B-1728B52AA6E4}">
+                <adec:decorative xmlns:adec="http://schemas.microsoft.com/office/drawing/2017/decorative" val="1"/>
+              </a:ext>
+            </a:extLst>
+          </p:cNvPr>
           <p:cNvPicPr>
             <a:picLocks noChangeAspect="1"/>
           </p:cNvPicPr>
@@ -3889,7 +4068,13 @@
       </p:sp>
       <p:sp>
         <p:nvSpPr>
-          <p:cNvPr id="12" name="Next"/>
+          <p:cNvPr id="12" name="Next" descr="">
+            <a:extLst>
+              <a:ext uri="{C183D7F6-B498-43B3-948B-1728B52AA6E4}">
+                <adec:decorative xmlns:adec="http://schemas.microsoft.com/office/drawing/2017/decorative" val="1"/>
+              </a:ext>
+            </a:extLst>
+          </p:cNvPr>
           <p:cNvSpPr/>
           <p:nvPr/>
         </p:nvSpPr>
@@ -3923,7 +4108,13 @@
       </p:sp>
       <p:sp>
         <p:nvSpPr>
-          <p:cNvPr id="13" name="Icon FaBook"/>
+          <p:cNvPr id="13" name="Icon FaBook" descr="">
+            <a:extLst>
+              <a:ext uri="{C183D7F6-B498-43B3-948B-1728B52AA6E4}">
+                <adec:decorative xmlns:adec="http://schemas.microsoft.com/office/drawing/2017/decorative" val="1"/>
+              </a:ext>
+            </a:extLst>
+          </p:cNvPr>
           <p:cNvSpPr/>
           <p:nvPr/>
         </p:nvSpPr>
@@ -3948,7 +4139,13 @@
       </p:sp>
       <p:pic>
         <p:nvPicPr>
-          <p:cNvPr id="14" name="Image 1" descr="C:\Users\whale\git\mwb-b05\presentations\_build\icons\FaBook.png">    </p:cNvPr>
+          <p:cNvPr id="14" name="Image 1" descr="">
+            <a:extLst>
+              <a:ext uri="{C183D7F6-B498-43B3-948B-1728B52AA6E4}">
+                <adec:decorative xmlns:adec="http://schemas.microsoft.com/office/drawing/2017/decorative" val="1"/>
+              </a:ext>
+            </a:extLst>
+          </p:cNvPr>
           <p:cNvPicPr>
             <a:picLocks noChangeAspect="1"/>
           </p:cNvPicPr>
@@ -4554,7 +4751,13 @@
       </p:sp>
       <p:sp>
         <p:nvSpPr>
-          <p:cNvPr id="3" name="Tag Why"/>
+          <p:cNvPr id="3" name="Tag Why" descr="">
+            <a:extLst>
+              <a:ext uri="{C183D7F6-B498-43B3-948B-1728B52AA6E4}">
+                <adec:decorative xmlns:adec="http://schemas.microsoft.com/office/drawing/2017/decorative" val="1"/>
+              </a:ext>
+            </a:extLst>
+          </p:cNvPr>
           <p:cNvSpPr/>
           <p:nvPr/>
         </p:nvSpPr>
@@ -4653,7 +4856,13 @@
       </p:sp>
       <p:sp>
         <p:nvSpPr>
-          <p:cNvPr id="6" name="Job 0"/>
+          <p:cNvPr id="6" name="Job 0" descr="">
+            <a:extLst>
+              <a:ext uri="{C183D7F6-B498-43B3-948B-1728B52AA6E4}">
+                <adec:decorative xmlns:adec="http://schemas.microsoft.com/office/drawing/2017/decorative" val="1"/>
+              </a:ext>
+            </a:extLst>
+          </p:cNvPr>
           <p:cNvSpPr/>
           <p:nvPr/>
         </p:nvSpPr>
@@ -4734,7 +4943,13 @@
       </p:sp>
       <p:sp>
         <p:nvSpPr>
-          <p:cNvPr id="8" name="Job 1"/>
+          <p:cNvPr id="8" name="Job 1" descr="">
+            <a:extLst>
+              <a:ext uri="{C183D7F6-B498-43B3-948B-1728B52AA6E4}">
+                <adec:decorative xmlns:adec="http://schemas.microsoft.com/office/drawing/2017/decorative" val="1"/>
+              </a:ext>
+            </a:extLst>
+          </p:cNvPr>
           <p:cNvSpPr/>
           <p:nvPr/>
         </p:nvSpPr>
@@ -4815,7 +5030,13 @@
       </p:sp>
       <p:sp>
         <p:nvSpPr>
-          <p:cNvPr id="10" name="Job 2"/>
+          <p:cNvPr id="10" name="Job 2" descr="">
+            <a:extLst>
+              <a:ext uri="{C183D7F6-B498-43B3-948B-1728B52AA6E4}">
+                <adec:decorative xmlns:adec="http://schemas.microsoft.com/office/drawing/2017/decorative" val="1"/>
+              </a:ext>
+            </a:extLst>
+          </p:cNvPr>
           <p:cNvSpPr/>
           <p:nvPr/>
         </p:nvSpPr>
@@ -4896,7 +5117,13 @@
       </p:sp>
       <p:sp>
         <p:nvSpPr>
-          <p:cNvPr id="12" name="Job 3"/>
+          <p:cNvPr id="12" name="Job 3" descr="">
+            <a:extLst>
+              <a:ext uri="{C183D7F6-B498-43B3-948B-1728B52AA6E4}">
+                <adec:decorative xmlns:adec="http://schemas.microsoft.com/office/drawing/2017/decorative" val="1"/>
+              </a:ext>
+            </a:extLst>
+          </p:cNvPr>
           <p:cNvSpPr/>
           <p:nvPr/>
         </p:nvSpPr>
@@ -4977,7 +5204,13 @@
       </p:sp>
       <p:sp>
         <p:nvSpPr>
-          <p:cNvPr id="14" name="Job 4"/>
+          <p:cNvPr id="14" name="Job 4" descr="">
+            <a:extLst>
+              <a:ext uri="{C183D7F6-B498-43B3-948B-1728B52AA6E4}">
+                <adec:decorative xmlns:adec="http://schemas.microsoft.com/office/drawing/2017/decorative" val="1"/>
+              </a:ext>
+            </a:extLst>
+          </p:cNvPr>
           <p:cNvSpPr/>
           <p:nvPr/>
         </p:nvSpPr>
@@ -5058,7 +5291,13 @@
       </p:sp>
       <p:sp>
         <p:nvSpPr>
-          <p:cNvPr id="16" name="Intune box"/>
+          <p:cNvPr id="16" name="Intune box" descr="">
+            <a:extLst>
+              <a:ext uri="{C183D7F6-B498-43B3-948B-1728B52AA6E4}">
+                <adec:decorative xmlns:adec="http://schemas.microsoft.com/office/drawing/2017/decorative" val="1"/>
+              </a:ext>
+            </a:extLst>
+          </p:cNvPr>
           <p:cNvSpPr/>
           <p:nvPr/>
         </p:nvSpPr>
@@ -5092,7 +5331,13 @@
       </p:sp>
       <p:sp>
         <p:nvSpPr>
-          <p:cNvPr id="17" name="Icon FaLaptop"/>
+          <p:cNvPr id="17" name="Icon FaLaptop" descr="">
+            <a:extLst>
+              <a:ext uri="{C183D7F6-B498-43B3-948B-1728B52AA6E4}">
+                <adec:decorative xmlns:adec="http://schemas.microsoft.com/office/drawing/2017/decorative" val="1"/>
+              </a:ext>
+            </a:extLst>
+          </p:cNvPr>
           <p:cNvSpPr/>
           <p:nvPr/>
         </p:nvSpPr>
@@ -5117,7 +5362,13 @@
       </p:sp>
       <p:pic>
         <p:nvPicPr>
-          <p:cNvPr id="18" name="Image 0" descr="C:\Users\whale\git\mwb-b05\presentations\_build\icons\FaLaptop.png">    </p:cNvPr>
+          <p:cNvPr id="18" name="Image 0" descr="">
+            <a:extLst>
+              <a:ext uri="{C183D7F6-B498-43B3-948B-1728B52AA6E4}">
+                <adec:decorative xmlns:adec="http://schemas.microsoft.com/office/drawing/2017/decorative" val="1"/>
+              </a:ext>
+            </a:extLst>
+          </p:cNvPr>
           <p:cNvPicPr>
             <a:picLocks noChangeAspect="1"/>
           </p:cNvPicPr>
@@ -5288,7 +5539,13 @@
       </p:sp>
       <p:sp>
         <p:nvSpPr>
-          <p:cNvPr id="21" name="Not a migration"/>
+          <p:cNvPr id="21" name="Not a migration" descr="">
+            <a:extLst>
+              <a:ext uri="{C183D7F6-B498-43B3-948B-1728B52AA6E4}">
+                <adec:decorative xmlns:adec="http://schemas.microsoft.com/office/drawing/2017/decorative" val="1"/>
+              </a:ext>
+            </a:extLst>
+          </p:cNvPr>
           <p:cNvSpPr/>
           <p:nvPr/>
         </p:nvSpPr>
@@ -5322,7 +5579,13 @@
       </p:sp>
       <p:sp>
         <p:nvSpPr>
-          <p:cNvPr id="22" name="Icon FaTriangleExclamation"/>
+          <p:cNvPr id="22" name="Icon FaTriangleExclamation" descr="">
+            <a:extLst>
+              <a:ext uri="{C183D7F6-B498-43B3-948B-1728B52AA6E4}">
+                <adec:decorative xmlns:adec="http://schemas.microsoft.com/office/drawing/2017/decorative" val="1"/>
+              </a:ext>
+            </a:extLst>
+          </p:cNvPr>
           <p:cNvSpPr/>
           <p:nvPr/>
         </p:nvSpPr>
@@ -5347,7 +5610,13 @@
       </p:sp>
       <p:pic>
         <p:nvPicPr>
-          <p:cNvPr id="23" name="Image 1" descr="C:\Users\whale\git\mwb-b05\presentations\_build\icons\FaTriangleExclamation.png">    </p:cNvPr>
+          <p:cNvPr id="23" name="Image 1" descr="">
+            <a:extLst>
+              <a:ext uri="{C183D7F6-B498-43B3-948B-1728B52AA6E4}">
+                <adec:decorative xmlns:adec="http://schemas.microsoft.com/office/drawing/2017/decorative" val="1"/>
+              </a:ext>
+            </a:extLst>
+          </p:cNvPr>
           <p:cNvPicPr>
             <a:picLocks noChangeAspect="1"/>
           </p:cNvPicPr>
@@ -5565,7 +5834,13 @@
       </p:sp>
       <p:sp>
         <p:nvSpPr>
-          <p:cNvPr id="3" name="Tag Why"/>
+          <p:cNvPr id="3" name="Tag Why" descr="">
+            <a:extLst>
+              <a:ext uri="{C183D7F6-B498-43B3-948B-1728B52AA6E4}">
+                <adec:decorative xmlns:adec="http://schemas.microsoft.com/office/drawing/2017/decorative" val="1"/>
+              </a:ext>
+            </a:extLst>
+          </p:cNvPr>
           <p:cNvSpPr/>
           <p:nvPr/>
         </p:nvSpPr>
@@ -5647,7 +5922,7 @@
         <a:graphic>
           <a:graphicData uri="http://schemas.openxmlformats.org/drawingml/2006/table">
             <a:tbl>
-              <a:tblPr/>
+              <a:tblPr firstRow="1" bandRow="1"/>
               <a:tblGrid>
                 <a:gridCol w="3291840"/>
                 <a:gridCol w="3657600"/>
@@ -6210,7 +6485,13 @@
       </p:graphicFrame>
       <p:sp>
         <p:nvSpPr>
-          <p:cNvPr id="6" name="Switch box"/>
+          <p:cNvPr id="6" name="Switch box" descr="">
+            <a:extLst>
+              <a:ext uri="{C183D7F6-B498-43B3-948B-1728B52AA6E4}">
+                <adec:decorative xmlns:adec="http://schemas.microsoft.com/office/drawing/2017/decorative" val="1"/>
+              </a:ext>
+            </a:extLst>
+          </p:cNvPr>
           <p:cNvSpPr/>
           <p:nvPr/>
         </p:nvSpPr>
@@ -6244,7 +6525,13 @@
       </p:sp>
       <p:sp>
         <p:nvSpPr>
-          <p:cNvPr id="7" name="Icon FaArrowsRotate"/>
+          <p:cNvPr id="7" name="Icon FaArrowsRotate" descr="">
+            <a:extLst>
+              <a:ext uri="{C183D7F6-B498-43B3-948B-1728B52AA6E4}">
+                <adec:decorative xmlns:adec="http://schemas.microsoft.com/office/drawing/2017/decorative" val="1"/>
+              </a:ext>
+            </a:extLst>
+          </p:cNvPr>
           <p:cNvSpPr/>
           <p:nvPr/>
         </p:nvSpPr>
@@ -6269,7 +6556,13 @@
       </p:sp>
       <p:pic>
         <p:nvPicPr>
-          <p:cNvPr id="8" name="Image 0" descr="C:\Users\whale\git\mwb-b05\presentations\_build\icons\FaArrowsRotate.png">    </p:cNvPr>
+          <p:cNvPr id="8" name="Image 0" descr="">
+            <a:extLst>
+              <a:ext uri="{C183D7F6-B498-43B3-948B-1728B52AA6E4}">
+                <adec:decorative xmlns:adec="http://schemas.microsoft.com/office/drawing/2017/decorative" val="1"/>
+              </a:ext>
+            </a:extLst>
+          </p:cNvPr>
           <p:cNvPicPr>
             <a:picLocks noChangeAspect="1"/>
           </p:cNvPicPr>
@@ -6408,7 +6701,13 @@
       </p:sp>
       <p:sp>
         <p:nvSpPr>
-          <p:cNvPr id="11" name="Governed"/>
+          <p:cNvPr id="11" name="Governed" descr="">
+            <a:extLst>
+              <a:ext uri="{C183D7F6-B498-43B3-948B-1728B52AA6E4}">
+                <adec:decorative xmlns:adec="http://schemas.microsoft.com/office/drawing/2017/decorative" val="1"/>
+              </a:ext>
+            </a:extLst>
+          </p:cNvPr>
           <p:cNvSpPr/>
           <p:nvPr/>
         </p:nvSpPr>
@@ -6442,7 +6741,13 @@
       </p:sp>
       <p:sp>
         <p:nvSpPr>
-          <p:cNvPr id="12" name="Icon FaRoute"/>
+          <p:cNvPr id="12" name="Icon FaRoute" descr="">
+            <a:extLst>
+              <a:ext uri="{C183D7F6-B498-43B3-948B-1728B52AA6E4}">
+                <adec:decorative xmlns:adec="http://schemas.microsoft.com/office/drawing/2017/decorative" val="1"/>
+              </a:ext>
+            </a:extLst>
+          </p:cNvPr>
           <p:cNvSpPr/>
           <p:nvPr/>
         </p:nvSpPr>
@@ -6467,7 +6772,13 @@
       </p:sp>
       <p:pic>
         <p:nvPicPr>
-          <p:cNvPr id="13" name="Image 1" descr="C:\Users\whale\git\mwb-b05\presentations\_build\icons\FaRoute.png">    </p:cNvPr>
+          <p:cNvPr id="13" name="Image 1" descr="">
+            <a:extLst>
+              <a:ext uri="{C183D7F6-B498-43B3-948B-1728B52AA6E4}">
+                <adec:decorative xmlns:adec="http://schemas.microsoft.com/office/drawing/2017/decorative" val="1"/>
+              </a:ext>
+            </a:extLst>
+          </p:cNvPr>
           <p:cNvPicPr>
             <a:picLocks noChangeAspect="1"/>
           </p:cNvPicPr>
@@ -6685,7 +6996,13 @@
       </p:sp>
       <p:sp>
         <p:nvSpPr>
-          <p:cNvPr id="3" name="Tag What"/>
+          <p:cNvPr id="3" name="Tag What" descr="">
+            <a:extLst>
+              <a:ext uri="{C183D7F6-B498-43B3-948B-1728B52AA6E4}">
+                <adec:decorative xmlns:adec="http://schemas.microsoft.com/office/drawing/2017/decorative" val="1"/>
+              </a:ext>
+            </a:extLst>
+          </p:cNvPr>
           <p:cNvSpPr/>
           <p:nvPr/>
         </p:nvSpPr>
@@ -6748,7 +7065,13 @@
       </p:sp>
       <p:sp>
         <p:nvSpPr>
-          <p:cNvPr id="5" name="Road 0"/>
+          <p:cNvPr id="5" name="Road 0" descr="">
+            <a:extLst>
+              <a:ext uri="{C183D7F6-B498-43B3-948B-1728B52AA6E4}">
+                <adec:decorative xmlns:adec="http://schemas.microsoft.com/office/drawing/2017/decorative" val="1"/>
+              </a:ext>
+            </a:extLst>
+          </p:cNvPr>
           <p:cNvSpPr/>
           <p:nvPr/>
         </p:nvSpPr>
@@ -6782,7 +7105,13 @@
       </p:sp>
       <p:sp>
         <p:nvSpPr>
-          <p:cNvPr id="6" name="Icon FaLaptop"/>
+          <p:cNvPr id="6" name="Icon FaLaptop" descr="">
+            <a:extLst>
+              <a:ext uri="{C183D7F6-B498-43B3-948B-1728B52AA6E4}">
+                <adec:decorative xmlns:adec="http://schemas.microsoft.com/office/drawing/2017/decorative" val="1"/>
+              </a:ext>
+            </a:extLst>
+          </p:cNvPr>
           <p:cNvSpPr/>
           <p:nvPr/>
         </p:nvSpPr>
@@ -6807,7 +7136,13 @@
       </p:sp>
       <p:pic>
         <p:nvPicPr>
-          <p:cNvPr id="7" name="Image 0" descr="C:\Users\whale\git\mwb-b05\presentations\_build\icons\FaLaptop.png">    </p:cNvPr>
+          <p:cNvPr id="7" name="Image 0" descr="">
+            <a:extLst>
+              <a:ext uri="{C183D7F6-B498-43B3-948B-1728B52AA6E4}">
+                <adec:decorative xmlns:adec="http://schemas.microsoft.com/office/drawing/2017/decorative" val="1"/>
+              </a:ext>
+            </a:extLst>
+          </p:cNvPr>
           <p:cNvPicPr>
             <a:picLocks noChangeAspect="1"/>
           </p:cNvPicPr>
@@ -6964,7 +7299,13 @@
       </p:sp>
       <p:sp>
         <p:nvSpPr>
-          <p:cNvPr id="10" name="Road 1"/>
+          <p:cNvPr id="10" name="Road 1" descr="">
+            <a:extLst>
+              <a:ext uri="{C183D7F6-B498-43B3-948B-1728B52AA6E4}">
+                <adec:decorative xmlns:adec="http://schemas.microsoft.com/office/drawing/2017/decorative" val="1"/>
+              </a:ext>
+            </a:extLst>
+          </p:cNvPr>
           <p:cNvSpPr/>
           <p:nvPr/>
         </p:nvSpPr>
@@ -6998,7 +7339,13 @@
       </p:sp>
       <p:sp>
         <p:nvSpPr>
-          <p:cNvPr id="11" name="Icon FaServer"/>
+          <p:cNvPr id="11" name="Icon FaServer" descr="">
+            <a:extLst>
+              <a:ext uri="{C183D7F6-B498-43B3-948B-1728B52AA6E4}">
+                <adec:decorative xmlns:adec="http://schemas.microsoft.com/office/drawing/2017/decorative" val="1"/>
+              </a:ext>
+            </a:extLst>
+          </p:cNvPr>
           <p:cNvSpPr/>
           <p:nvPr/>
         </p:nvSpPr>
@@ -7023,7 +7370,13 @@
       </p:sp>
       <p:pic>
         <p:nvPicPr>
-          <p:cNvPr id="12" name="Image 1" descr="C:\Users\whale\git\mwb-b05\presentations\_build\icons\FaServer.png">    </p:cNvPr>
+          <p:cNvPr id="12" name="Image 1" descr="">
+            <a:extLst>
+              <a:ext uri="{C183D7F6-B498-43B3-948B-1728B52AA6E4}">
+                <adec:decorative xmlns:adec="http://schemas.microsoft.com/office/drawing/2017/decorative" val="1"/>
+              </a:ext>
+            </a:extLst>
+          </p:cNvPr>
           <p:cNvPicPr>
             <a:picLocks noChangeAspect="1"/>
           </p:cNvPicPr>
@@ -7180,7 +7533,13 @@
       </p:sp>
       <p:sp>
         <p:nvSpPr>
-          <p:cNvPr id="15" name="Onboard box"/>
+          <p:cNvPr id="15" name="Onboard box" descr="">
+            <a:extLst>
+              <a:ext uri="{C183D7F6-B498-43B3-948B-1728B52AA6E4}">
+                <adec:decorative xmlns:adec="http://schemas.microsoft.com/office/drawing/2017/decorative" val="1"/>
+              </a:ext>
+            </a:extLst>
+          </p:cNvPr>
           <p:cNvSpPr/>
           <p:nvPr/>
         </p:nvSpPr>
@@ -7214,7 +7573,13 @@
       </p:sp>
       <p:sp>
         <p:nvSpPr>
-          <p:cNvPr id="16" name="Icon FaDoorOpen"/>
+          <p:cNvPr id="16" name="Icon FaDoorOpen" descr="">
+            <a:extLst>
+              <a:ext uri="{C183D7F6-B498-43B3-948B-1728B52AA6E4}">
+                <adec:decorative xmlns:adec="http://schemas.microsoft.com/office/drawing/2017/decorative" val="1"/>
+              </a:ext>
+            </a:extLst>
+          </p:cNvPr>
           <p:cNvSpPr/>
           <p:nvPr/>
         </p:nvSpPr>
@@ -7239,7 +7604,13 @@
       </p:sp>
       <p:pic>
         <p:nvPicPr>
-          <p:cNvPr id="17" name="Image 2" descr="C:\Users\whale\git\mwb-b05\presentations\_build\icons\FaDoorOpen.png">    </p:cNvPr>
+          <p:cNvPr id="17" name="Image 2" descr="">
+            <a:extLst>
+              <a:ext uri="{C183D7F6-B498-43B3-948B-1728B52AA6E4}">
+                <adec:decorative xmlns:adec="http://schemas.microsoft.com/office/drawing/2017/decorative" val="1"/>
+              </a:ext>
+            </a:extLst>
+          </p:cNvPr>
           <p:cNvPicPr>
             <a:picLocks noChangeAspect="1"/>
           </p:cNvPicPr>
@@ -7338,7 +7709,13 @@
       </p:sp>
       <p:sp>
         <p:nvSpPr>
-          <p:cNvPr id="20" name="Correlate"/>
+          <p:cNvPr id="20" name="Correlate" descr="">
+            <a:extLst>
+              <a:ext uri="{C183D7F6-B498-43B3-948B-1728B52AA6E4}">
+                <adec:decorative xmlns:adec="http://schemas.microsoft.com/office/drawing/2017/decorative" val="1"/>
+              </a:ext>
+            </a:extLst>
+          </p:cNvPr>
           <p:cNvSpPr/>
           <p:nvPr/>
         </p:nvSpPr>
@@ -7372,7 +7749,13 @@
       </p:sp>
       <p:sp>
         <p:nvSpPr>
-          <p:cNvPr id="21" name="Icon FaSitemap"/>
+          <p:cNvPr id="21" name="Icon FaSitemap" descr="">
+            <a:extLst>
+              <a:ext uri="{C183D7F6-B498-43B3-948B-1728B52AA6E4}">
+                <adec:decorative xmlns:adec="http://schemas.microsoft.com/office/drawing/2017/decorative" val="1"/>
+              </a:ext>
+            </a:extLst>
+          </p:cNvPr>
           <p:cNvSpPr/>
           <p:nvPr/>
         </p:nvSpPr>
@@ -7397,7 +7780,13 @@
       </p:sp>
       <p:pic>
         <p:nvPicPr>
-          <p:cNvPr id="22" name="Image 3" descr="C:\Users\whale\git\mwb-b05\presentations\_build\icons\FaSitemap.png">    </p:cNvPr>
+          <p:cNvPr id="22" name="Image 3" descr="">
+            <a:extLst>
+              <a:ext uri="{C183D7F6-B498-43B3-948B-1728B52AA6E4}">
+                <adec:decorative xmlns:adec="http://schemas.microsoft.com/office/drawing/2017/decorative" val="1"/>
+              </a:ext>
+            </a:extLst>
+          </p:cNvPr>
           <p:cNvPicPr>
             <a:picLocks noChangeAspect="1"/>
           </p:cNvPicPr>
@@ -7615,7 +8004,13 @@
       </p:sp>
       <p:sp>
         <p:nvSpPr>
-          <p:cNvPr id="3" name="Tag What"/>
+          <p:cNvPr id="3" name="Tag What" descr="">
+            <a:extLst>
+              <a:ext uri="{C183D7F6-B498-43B3-948B-1728B52AA6E4}">
+                <adec:decorative xmlns:adec="http://schemas.microsoft.com/office/drawing/2017/decorative" val="1"/>
+              </a:ext>
+            </a:extLst>
+          </p:cNvPr>
           <p:cNvSpPr/>
           <p:nvPr/>
         </p:nvSpPr>
@@ -7678,7 +8073,13 @@
       </p:sp>
       <p:sp>
         <p:nvSpPr>
-          <p:cNvPr id="5" name="Pillar 0"/>
+          <p:cNvPr id="5" name="Pillar 0" descr="">
+            <a:extLst>
+              <a:ext uri="{C183D7F6-B498-43B3-948B-1728B52AA6E4}">
+                <adec:decorative xmlns:adec="http://schemas.microsoft.com/office/drawing/2017/decorative" val="1"/>
+              </a:ext>
+            </a:extLst>
+          </p:cNvPr>
           <p:cNvSpPr/>
           <p:nvPr/>
         </p:nvSpPr>
@@ -7759,7 +8160,13 @@
       </p:sp>
       <p:sp>
         <p:nvSpPr>
-          <p:cNvPr id="7" name="Pillar 1"/>
+          <p:cNvPr id="7" name="Pillar 1" descr="">
+            <a:extLst>
+              <a:ext uri="{C183D7F6-B498-43B3-948B-1728B52AA6E4}">
+                <adec:decorative xmlns:adec="http://schemas.microsoft.com/office/drawing/2017/decorative" val="1"/>
+              </a:ext>
+            </a:extLst>
+          </p:cNvPr>
           <p:cNvSpPr/>
           <p:nvPr/>
         </p:nvSpPr>
@@ -7840,7 +8247,13 @@
       </p:sp>
       <p:sp>
         <p:nvSpPr>
-          <p:cNvPr id="9" name="Pillar 2"/>
+          <p:cNvPr id="9" name="Pillar 2" descr="">
+            <a:extLst>
+              <a:ext uri="{C183D7F6-B498-43B3-948B-1728B52AA6E4}">
+                <adec:decorative xmlns:adec="http://schemas.microsoft.com/office/drawing/2017/decorative" val="1"/>
+              </a:ext>
+            </a:extLst>
+          </p:cNvPr>
           <p:cNvSpPr/>
           <p:nvPr/>
         </p:nvSpPr>
@@ -7921,7 +8334,13 @@
       </p:sp>
       <p:sp>
         <p:nvSpPr>
-          <p:cNvPr id="11" name="Pillar 3"/>
+          <p:cNvPr id="11" name="Pillar 3" descr="">
+            <a:extLst>
+              <a:ext uri="{C183D7F6-B498-43B3-948B-1728B52AA6E4}">
+                <adec:decorative xmlns:adec="http://schemas.microsoft.com/office/drawing/2017/decorative" val="1"/>
+              </a:ext>
+            </a:extLst>
+          </p:cNvPr>
           <p:cNvSpPr/>
           <p:nvPr/>
         </p:nvSpPr>
@@ -8002,7 +8421,13 @@
       </p:sp>
       <p:sp>
         <p:nvSpPr>
-          <p:cNvPr id="13" name="Pillar 4"/>
+          <p:cNvPr id="13" name="Pillar 4" descr="">
+            <a:extLst>
+              <a:ext uri="{C183D7F6-B498-43B3-948B-1728B52AA6E4}">
+                <adec:decorative xmlns:adec="http://schemas.microsoft.com/office/drawing/2017/decorative" val="1"/>
+              </a:ext>
+            </a:extLst>
+          </p:cNvPr>
           <p:cNvSpPr/>
           <p:nvPr/>
         </p:nvSpPr>
@@ -8083,7 +8508,13 @@
       </p:sp>
       <p:sp>
         <p:nvSpPr>
-          <p:cNvPr id="15" name="Autopilot box"/>
+          <p:cNvPr id="15" name="Autopilot box" descr="">
+            <a:extLst>
+              <a:ext uri="{C183D7F6-B498-43B3-948B-1728B52AA6E4}">
+                <adec:decorative xmlns:adec="http://schemas.microsoft.com/office/drawing/2017/decorative" val="1"/>
+              </a:ext>
+            </a:extLst>
+          </p:cNvPr>
           <p:cNvSpPr/>
           <p:nvPr/>
         </p:nvSpPr>
@@ -8117,7 +8548,13 @@
       </p:sp>
       <p:sp>
         <p:nvSpPr>
-          <p:cNvPr id="16" name="Icon FaLaptop"/>
+          <p:cNvPr id="16" name="Icon FaLaptop" descr="">
+            <a:extLst>
+              <a:ext uri="{C183D7F6-B498-43B3-948B-1728B52AA6E4}">
+                <adec:decorative xmlns:adec="http://schemas.microsoft.com/office/drawing/2017/decorative" val="1"/>
+              </a:ext>
+            </a:extLst>
+          </p:cNvPr>
           <p:cNvSpPr/>
           <p:nvPr/>
         </p:nvSpPr>
@@ -8142,7 +8579,13 @@
       </p:sp>
       <p:pic>
         <p:nvPicPr>
-          <p:cNvPr id="17" name="Image 0" descr="C:\Users\whale\git\mwb-b05\presentations\_build\icons\FaLaptop.png">    </p:cNvPr>
+          <p:cNvPr id="17" name="Image 0" descr="">
+            <a:extLst>
+              <a:ext uri="{C183D7F6-B498-43B3-948B-1728B52AA6E4}">
+                <adec:decorative xmlns:adec="http://schemas.microsoft.com/office/drawing/2017/decorative" val="1"/>
+              </a:ext>
+            </a:extLst>
+          </p:cNvPr>
           <p:cNvPicPr>
             <a:picLocks noChangeAspect="1"/>
           </p:cNvPicPr>
@@ -8241,7 +8684,13 @@
       </p:sp>
       <p:sp>
         <p:nvSpPr>
-          <p:cNvPr id="20" name="Doctrine"/>
+          <p:cNvPr id="20" name="Doctrine" descr="">
+            <a:extLst>
+              <a:ext uri="{C183D7F6-B498-43B3-948B-1728B52AA6E4}">
+                <adec:decorative xmlns:adec="http://schemas.microsoft.com/office/drawing/2017/decorative" val="1"/>
+              </a:ext>
+            </a:extLst>
+          </p:cNvPr>
           <p:cNvSpPr/>
           <p:nvPr/>
         </p:nvSpPr>
@@ -8275,7 +8724,13 @@
       </p:sp>
       <p:sp>
         <p:nvSpPr>
-          <p:cNvPr id="21" name="Icon FaClipboardCheck"/>
+          <p:cNvPr id="21" name="Icon FaClipboardCheck" descr="">
+            <a:extLst>
+              <a:ext uri="{C183D7F6-B498-43B3-948B-1728B52AA6E4}">
+                <adec:decorative xmlns:adec="http://schemas.microsoft.com/office/drawing/2017/decorative" val="1"/>
+              </a:ext>
+            </a:extLst>
+          </p:cNvPr>
           <p:cNvSpPr/>
           <p:nvPr/>
         </p:nvSpPr>
@@ -8300,7 +8755,13 @@
       </p:sp>
       <p:pic>
         <p:nvPicPr>
-          <p:cNvPr id="22" name="Image 1" descr="C:\Users\whale\git\mwb-b05\presentations\_build\icons\FaClipboardCheck.png">    </p:cNvPr>
+          <p:cNvPr id="22" name="Image 1" descr="">
+            <a:extLst>
+              <a:ext uri="{C183D7F6-B498-43B3-948B-1728B52AA6E4}">
+                <adec:decorative xmlns:adec="http://schemas.microsoft.com/office/drawing/2017/decorative" val="1"/>
+              </a:ext>
+            </a:extLst>
+          </p:cNvPr>
           <p:cNvPicPr>
             <a:picLocks noChangeAspect="1"/>
           </p:cNvPicPr>
@@ -8518,7 +8979,13 @@
       </p:sp>
       <p:sp>
         <p:nvSpPr>
-          <p:cNvPr id="3" name="Tag What"/>
+          <p:cNvPr id="3" name="Tag What" descr="">
+            <a:extLst>
+              <a:ext uri="{C183D7F6-B498-43B3-948B-1728B52AA6E4}">
+                <adec:decorative xmlns:adec="http://schemas.microsoft.com/office/drawing/2017/decorative" val="1"/>
+              </a:ext>
+            </a:extLst>
+          </p:cNvPr>
           <p:cNvSpPr/>
           <p:nvPr/>
         </p:nvSpPr>
@@ -8581,7 +9048,13 @@
       </p:sp>
       <p:sp>
         <p:nvSpPr>
-          <p:cNvPr id="5" name="Path 0"/>
+          <p:cNvPr id="5" name="Path 0" descr="">
+            <a:extLst>
+              <a:ext uri="{C183D7F6-B498-43B3-948B-1728B52AA6E4}">
+                <adec:decorative xmlns:adec="http://schemas.microsoft.com/office/drawing/2017/decorative" val="1"/>
+              </a:ext>
+            </a:extLst>
+          </p:cNvPr>
           <p:cNvSpPr/>
           <p:nvPr/>
         </p:nvSpPr>
@@ -8708,7 +9181,13 @@
       </p:sp>
       <p:sp>
         <p:nvSpPr>
-          <p:cNvPr id="7" name="Path 1"/>
+          <p:cNvPr id="7" name="Path 1" descr="">
+            <a:extLst>
+              <a:ext uri="{C183D7F6-B498-43B3-948B-1728B52AA6E4}">
+                <adec:decorative xmlns:adec="http://schemas.microsoft.com/office/drawing/2017/decorative" val="1"/>
+              </a:ext>
+            </a:extLst>
+          </p:cNvPr>
           <p:cNvSpPr/>
           <p:nvPr/>
         </p:nvSpPr>
@@ -8835,7 +9314,13 @@
       </p:sp>
       <p:sp>
         <p:nvSpPr>
-          <p:cNvPr id="9" name="Path 2"/>
+          <p:cNvPr id="9" name="Path 2" descr="">
+            <a:extLst>
+              <a:ext uri="{C183D7F6-B498-43B3-948B-1728B52AA6E4}">
+                <adec:decorative xmlns:adec="http://schemas.microsoft.com/office/drawing/2017/decorative" val="1"/>
+              </a:ext>
+            </a:extLst>
+          </p:cNvPr>
           <p:cNvSpPr/>
           <p:nvPr/>
         </p:nvSpPr>
@@ -8962,7 +9447,13 @@
       </p:sp>
       <p:sp>
         <p:nvSpPr>
-          <p:cNvPr id="11" name="Same end"/>
+          <p:cNvPr id="11" name="Same end" descr="">
+            <a:extLst>
+              <a:ext uri="{C183D7F6-B498-43B3-948B-1728B52AA6E4}">
+                <adec:decorative xmlns:adec="http://schemas.microsoft.com/office/drawing/2017/decorative" val="1"/>
+              </a:ext>
+            </a:extLst>
+          </p:cNvPr>
           <p:cNvSpPr/>
           <p:nvPr/>
         </p:nvSpPr>
@@ -8996,7 +9487,13 @@
       </p:sp>
       <p:sp>
         <p:nvSpPr>
-          <p:cNvPr id="12" name="Icon FaClipboardCheck"/>
+          <p:cNvPr id="12" name="Icon FaClipboardCheck" descr="">
+            <a:extLst>
+              <a:ext uri="{C183D7F6-B498-43B3-948B-1728B52AA6E4}">
+                <adec:decorative xmlns:adec="http://schemas.microsoft.com/office/drawing/2017/decorative" val="1"/>
+              </a:ext>
+            </a:extLst>
+          </p:cNvPr>
           <p:cNvSpPr/>
           <p:nvPr/>
         </p:nvSpPr>
@@ -9021,7 +9518,13 @@
       </p:sp>
       <p:pic>
         <p:nvPicPr>
-          <p:cNvPr id="13" name="Image 0" descr="C:\Users\whale\git\mwb-b05\presentations\_build\icons\FaClipboardCheck.png">    </p:cNvPr>
+          <p:cNvPr id="13" name="Image 0" descr="">
+            <a:extLst>
+              <a:ext uri="{C183D7F6-B498-43B3-948B-1728B52AA6E4}">
+                <adec:decorative xmlns:adec="http://schemas.microsoft.com/office/drawing/2017/decorative" val="1"/>
+              </a:ext>
+            </a:extLst>
+          </p:cNvPr>
           <p:cNvPicPr>
             <a:picLocks noChangeAspect="1"/>
           </p:cNvPicPr>
@@ -9239,7 +9742,13 @@
       </p:sp>
       <p:sp>
         <p:nvSpPr>
-          <p:cNvPr id="3" name="Tag Who"/>
+          <p:cNvPr id="3" name="Tag Who" descr="">
+            <a:extLst>
+              <a:ext uri="{C183D7F6-B498-43B3-948B-1728B52AA6E4}">
+                <adec:decorative xmlns:adec="http://schemas.microsoft.com/office/drawing/2017/decorative" val="1"/>
+              </a:ext>
+            </a:extLst>
+          </p:cNvPr>
           <p:cNvSpPr/>
           <p:nvPr/>
         </p:nvSpPr>
@@ -9302,7 +9811,13 @@
       </p:sp>
       <p:sp>
         <p:nvSpPr>
-          <p:cNvPr id="5" name="Who col 1"/>
+          <p:cNvPr id="5" name="Who col 1" descr="">
+            <a:extLst>
+              <a:ext uri="{C183D7F6-B498-43B3-948B-1728B52AA6E4}">
+                <adec:decorative xmlns:adec="http://schemas.microsoft.com/office/drawing/2017/decorative" val="1"/>
+              </a:ext>
+            </a:extLst>
+          </p:cNvPr>
           <p:cNvSpPr/>
           <p:nvPr/>
         </p:nvSpPr>
@@ -9336,7 +9851,13 @@
       </p:sp>
       <p:sp>
         <p:nvSpPr>
-          <p:cNvPr id="6" name="Icon FaBuildingColumns"/>
+          <p:cNvPr id="6" name="Icon FaBuildingColumns" descr="">
+            <a:extLst>
+              <a:ext uri="{C183D7F6-B498-43B3-948B-1728B52AA6E4}">
+                <adec:decorative xmlns:adec="http://schemas.microsoft.com/office/drawing/2017/decorative" val="1"/>
+              </a:ext>
+            </a:extLst>
+          </p:cNvPr>
           <p:cNvSpPr/>
           <p:nvPr/>
         </p:nvSpPr>
@@ -9361,7 +9882,13 @@
       </p:sp>
       <p:pic>
         <p:nvPicPr>
-          <p:cNvPr id="7" name="Image 0" descr="C:\Users\whale\git\mwb-b05\presentations\_build\icons\FaBuildingColumns.png">    </p:cNvPr>
+          <p:cNvPr id="7" name="Image 0" descr="">
+            <a:extLst>
+              <a:ext uri="{C183D7F6-B498-43B3-948B-1728B52AA6E4}">
+                <adec:decorative xmlns:adec="http://schemas.microsoft.com/office/drawing/2017/decorative" val="1"/>
+              </a:ext>
+            </a:extLst>
+          </p:cNvPr>
           <p:cNvPicPr>
             <a:picLocks noChangeAspect="1"/>
           </p:cNvPicPr>
@@ -9548,7 +10075,13 @@
       </p:sp>
       <p:sp>
         <p:nvSpPr>
-          <p:cNvPr id="10" name="Who col 2"/>
+          <p:cNvPr id="10" name="Who col 2" descr="">
+            <a:extLst>
+              <a:ext uri="{C183D7F6-B498-43B3-948B-1728B52AA6E4}">
+                <adec:decorative xmlns:adec="http://schemas.microsoft.com/office/drawing/2017/decorative" val="1"/>
+              </a:ext>
+            </a:extLst>
+          </p:cNvPr>
           <p:cNvSpPr/>
           <p:nvPr/>
         </p:nvSpPr>
@@ -9582,7 +10115,13 @@
       </p:sp>
       <p:sp>
         <p:nvSpPr>
-          <p:cNvPr id="11" name="Icon FaUsersGear"/>
+          <p:cNvPr id="11" name="Icon FaUsersGear" descr="">
+            <a:extLst>
+              <a:ext uri="{C183D7F6-B498-43B3-948B-1728B52AA6E4}">
+                <adec:decorative xmlns:adec="http://schemas.microsoft.com/office/drawing/2017/decorative" val="1"/>
+              </a:ext>
+            </a:extLst>
+          </p:cNvPr>
           <p:cNvSpPr/>
           <p:nvPr/>
         </p:nvSpPr>
@@ -9607,7 +10146,13 @@
       </p:sp>
       <p:pic>
         <p:nvPicPr>
-          <p:cNvPr id="12" name="Image 1" descr="C:\Users\whale\git\mwb-b05\presentations\_build\icons\FaUsersGear.png">    </p:cNvPr>
+          <p:cNvPr id="12" name="Image 1" descr="">
+            <a:extLst>
+              <a:ext uri="{C183D7F6-B498-43B3-948B-1728B52AA6E4}">
+                <adec:decorative xmlns:adec="http://schemas.microsoft.com/office/drawing/2017/decorative" val="1"/>
+              </a:ext>
+            </a:extLst>
+          </p:cNvPr>
           <p:cNvPicPr>
             <a:picLocks noChangeAspect="1"/>
           </p:cNvPicPr>
@@ -9794,7 +10339,13 @@
       </p:sp>
       <p:sp>
         <p:nvSpPr>
-          <p:cNvPr id="15" name="Who col 3"/>
+          <p:cNvPr id="15" name="Who col 3" descr="">
+            <a:extLst>
+              <a:ext uri="{C183D7F6-B498-43B3-948B-1728B52AA6E4}">
+                <adec:decorative xmlns:adec="http://schemas.microsoft.com/office/drawing/2017/decorative" val="1"/>
+              </a:ext>
+            </a:extLst>
+          </p:cNvPr>
           <p:cNvSpPr/>
           <p:nvPr/>
         </p:nvSpPr>
@@ -9828,7 +10379,13 @@
       </p:sp>
       <p:sp>
         <p:nvSpPr>
-          <p:cNvPr id="16" name="Icon FaPeopleArrows"/>
+          <p:cNvPr id="16" name="Icon FaPeopleArrows" descr="">
+            <a:extLst>
+              <a:ext uri="{C183D7F6-B498-43B3-948B-1728B52AA6E4}">
+                <adec:decorative xmlns:adec="http://schemas.microsoft.com/office/drawing/2017/decorative" val="1"/>
+              </a:ext>
+            </a:extLst>
+          </p:cNvPr>
           <p:cNvSpPr/>
           <p:nvPr/>
         </p:nvSpPr>
@@ -9853,7 +10410,13 @@
       </p:sp>
       <p:pic>
         <p:nvPicPr>
-          <p:cNvPr id="17" name="Image 2" descr="C:\Users\whale\git\mwb-b05\presentations\_build\icons\FaPeopleArrows.png">    </p:cNvPr>
+          <p:cNvPr id="17" name="Image 2" descr="">
+            <a:extLst>
+              <a:ext uri="{C183D7F6-B498-43B3-948B-1728B52AA6E4}">
+                <adec:decorative xmlns:adec="http://schemas.microsoft.com/office/drawing/2017/decorative" val="1"/>
+              </a:ext>
+            </a:extLst>
+          </p:cNvPr>
           <p:cNvPicPr>
             <a:picLocks noChangeAspect="1"/>
           </p:cNvPicPr>
@@ -10040,7 +10603,13 @@
       </p:sp>
       <p:sp>
         <p:nvSpPr>
-          <p:cNvPr id="20" name="Least"/>
+          <p:cNvPr id="20" name="Least" descr="">
+            <a:extLst>
+              <a:ext uri="{C183D7F6-B498-43B3-948B-1728B52AA6E4}">
+                <adec:decorative xmlns:adec="http://schemas.microsoft.com/office/drawing/2017/decorative" val="1"/>
+              </a:ext>
+            </a:extLst>
+          </p:cNvPr>
           <p:cNvSpPr/>
           <p:nvPr/>
         </p:nvSpPr>
@@ -10074,7 +10643,13 @@
       </p:sp>
       <p:sp>
         <p:nvSpPr>
-          <p:cNvPr id="21" name="Icon FaUserShield"/>
+          <p:cNvPr id="21" name="Icon FaUserShield" descr="">
+            <a:extLst>
+              <a:ext uri="{C183D7F6-B498-43B3-948B-1728B52AA6E4}">
+                <adec:decorative xmlns:adec="http://schemas.microsoft.com/office/drawing/2017/decorative" val="1"/>
+              </a:ext>
+            </a:extLst>
+          </p:cNvPr>
           <p:cNvSpPr/>
           <p:nvPr/>
         </p:nvSpPr>
@@ -10099,7 +10674,13 @@
       </p:sp>
       <p:pic>
         <p:nvPicPr>
-          <p:cNvPr id="22" name="Image 3" descr="C:\Users\whale\git\mwb-b05\presentations\_build\icons\FaUserShield.png">    </p:cNvPr>
+          <p:cNvPr id="22" name="Image 3" descr="">
+            <a:extLst>
+              <a:ext uri="{C183D7F6-B498-43B3-948B-1728B52AA6E4}">
+                <adec:decorative xmlns:adec="http://schemas.microsoft.com/office/drawing/2017/decorative" val="1"/>
+              </a:ext>
+            </a:extLst>
+          </p:cNvPr>
           <p:cNvPicPr>
             <a:picLocks noChangeAspect="1"/>
           </p:cNvPicPr>
@@ -10317,7 +10898,13 @@
       </p:sp>
       <p:sp>
         <p:nvSpPr>
-          <p:cNvPr id="3" name="Tag How"/>
+          <p:cNvPr id="3" name="Tag How" descr="">
+            <a:extLst>
+              <a:ext uri="{C183D7F6-B498-43B3-948B-1728B52AA6E4}">
+                <adec:decorative xmlns:adec="http://schemas.microsoft.com/office/drawing/2017/decorative" val="1"/>
+              </a:ext>
+            </a:extLst>
+          </p:cNvPr>
           <p:cNvSpPr/>
           <p:nvPr/>
         </p:nvSpPr>
@@ -10380,7 +10967,13 @@
       </p:sp>
       <p:sp>
         <p:nvSpPr>
-          <p:cNvPr id="5" name="Step 0"/>
+          <p:cNvPr id="5" name="Step 0" descr="">
+            <a:extLst>
+              <a:ext uri="{C183D7F6-B498-43B3-948B-1728B52AA6E4}">
+                <adec:decorative xmlns:adec="http://schemas.microsoft.com/office/drawing/2017/decorative" val="1"/>
+              </a:ext>
+            </a:extLst>
+          </p:cNvPr>
           <p:cNvSpPr/>
           <p:nvPr/>
         </p:nvSpPr>
@@ -10467,7 +11060,13 @@
       </p:sp>
       <p:sp>
         <p:nvSpPr>
-          <p:cNvPr id="7" name="Step 1"/>
+          <p:cNvPr id="7" name="Step 1" descr="">
+            <a:extLst>
+              <a:ext uri="{C183D7F6-B498-43B3-948B-1728B52AA6E4}">
+                <adec:decorative xmlns:adec="http://schemas.microsoft.com/office/drawing/2017/decorative" val="1"/>
+              </a:ext>
+            </a:extLst>
+          </p:cNvPr>
           <p:cNvSpPr/>
           <p:nvPr/>
         </p:nvSpPr>
@@ -10554,7 +11153,13 @@
       </p:sp>
       <p:sp>
         <p:nvSpPr>
-          <p:cNvPr id="9" name="Step 2"/>
+          <p:cNvPr id="9" name="Step 2" descr="">
+            <a:extLst>
+              <a:ext uri="{C183D7F6-B498-43B3-948B-1728B52AA6E4}">
+                <adec:decorative xmlns:adec="http://schemas.microsoft.com/office/drawing/2017/decorative" val="1"/>
+              </a:ext>
+            </a:extLst>
+          </p:cNvPr>
           <p:cNvSpPr/>
           <p:nvPr/>
         </p:nvSpPr>
@@ -10641,7 +11246,13 @@
       </p:sp>
       <p:sp>
         <p:nvSpPr>
-          <p:cNvPr id="11" name="Step 3"/>
+          <p:cNvPr id="11" name="Step 3" descr="">
+            <a:extLst>
+              <a:ext uri="{C183D7F6-B498-43B3-948B-1728B52AA6E4}">
+                <adec:decorative xmlns:adec="http://schemas.microsoft.com/office/drawing/2017/decorative" val="1"/>
+              </a:ext>
+            </a:extLst>
+          </p:cNvPr>
           <p:cNvSpPr/>
           <p:nvPr/>
         </p:nvSpPr>
@@ -10728,7 +11339,13 @@
       </p:sp>
       <p:sp>
         <p:nvSpPr>
-          <p:cNvPr id="13" name="Step 4"/>
+          <p:cNvPr id="13" name="Step 4" descr="">
+            <a:extLst>
+              <a:ext uri="{C183D7F6-B498-43B3-948B-1728B52AA6E4}">
+                <adec:decorative xmlns:adec="http://schemas.microsoft.com/office/drawing/2017/decorative" val="1"/>
+              </a:ext>
+            </a:extLst>
+          </p:cNvPr>
           <p:cNvSpPr/>
           <p:nvPr/>
         </p:nvSpPr>
@@ -10815,7 +11432,13 @@
       </p:sp>
       <p:sp>
         <p:nvSpPr>
-          <p:cNvPr id="15" name="Step 5"/>
+          <p:cNvPr id="15" name="Step 5" descr="">
+            <a:extLst>
+              <a:ext uri="{C183D7F6-B498-43B3-948B-1728B52AA6E4}">
+                <adec:decorative xmlns:adec="http://schemas.microsoft.com/office/drawing/2017/decorative" val="1"/>
+              </a:ext>
+            </a:extLst>
+          </p:cNvPr>
           <p:cNvSpPr/>
           <p:nvPr/>
         </p:nvSpPr>
@@ -10902,7 +11525,13 @@
       </p:sp>
       <p:sp>
         <p:nvSpPr>
-          <p:cNvPr id="17" name="Step 6"/>
+          <p:cNvPr id="17" name="Step 6" descr="">
+            <a:extLst>
+              <a:ext uri="{C183D7F6-B498-43B3-948B-1728B52AA6E4}">
+                <adec:decorative xmlns:adec="http://schemas.microsoft.com/office/drawing/2017/decorative" val="1"/>
+              </a:ext>
+            </a:extLst>
+          </p:cNvPr>
           <p:cNvSpPr/>
           <p:nvPr/>
         </p:nvSpPr>
@@ -11083,7 +11712,13 @@
       </p:sp>
       <p:sp>
         <p:nvSpPr>
-          <p:cNvPr id="20" name="Analytics"/>
+          <p:cNvPr id="20" name="Analytics" descr="">
+            <a:extLst>
+              <a:ext uri="{C183D7F6-B498-43B3-948B-1728B52AA6E4}">
+                <adec:decorative xmlns:adec="http://schemas.microsoft.com/office/drawing/2017/decorative" val="1"/>
+              </a:ext>
+            </a:extLst>
+          </p:cNvPr>
           <p:cNvSpPr/>
           <p:nvPr/>
         </p:nvSpPr>
@@ -11117,7 +11752,13 @@
       </p:sp>
       <p:sp>
         <p:nvSpPr>
-          <p:cNvPr id="21" name="Icon FaFilter"/>
+          <p:cNvPr id="21" name="Icon FaFilter" descr="">
+            <a:extLst>
+              <a:ext uri="{C183D7F6-B498-43B3-948B-1728B52AA6E4}">
+                <adec:decorative xmlns:adec="http://schemas.microsoft.com/office/drawing/2017/decorative" val="1"/>
+              </a:ext>
+            </a:extLst>
+          </p:cNvPr>
           <p:cNvSpPr/>
           <p:nvPr/>
         </p:nvSpPr>
@@ -11142,7 +11783,13 @@
       </p:sp>
       <p:pic>
         <p:nvPicPr>
-          <p:cNvPr id="22" name="Image 0" descr="C:\Users\whale\git\mwb-b05\presentations\_build\icons\FaFilter.png">    </p:cNvPr>
+          <p:cNvPr id="22" name="Image 0" descr="">
+            <a:extLst>
+              <a:ext uri="{C183D7F6-B498-43B3-948B-1728B52AA6E4}">
+                <adec:decorative xmlns:adec="http://schemas.microsoft.com/office/drawing/2017/decorative" val="1"/>
+              </a:ext>
+            </a:extLst>
+          </p:cNvPr>
           <p:cNvPicPr>
             <a:picLocks noChangeAspect="1"/>
           </p:cNvPicPr>
@@ -11360,7 +12007,13 @@
       </p:sp>
       <p:sp>
         <p:nvSpPr>
-          <p:cNvPr id="3" name="Tag How"/>
+          <p:cNvPr id="3" name="Tag How" descr="">
+            <a:extLst>
+              <a:ext uri="{C183D7F6-B498-43B3-948B-1728B52AA6E4}">
+                <adec:decorative xmlns:adec="http://schemas.microsoft.com/office/drawing/2017/decorative" val="1"/>
+              </a:ext>
+            </a:extLst>
+          </p:cNvPr>
           <p:cNvSpPr/>
           <p:nvPr/>
         </p:nvSpPr>
@@ -11442,7 +12095,7 @@
         <a:graphic>
           <a:graphicData uri="http://schemas.openxmlformats.org/drawingml/2006/table">
             <a:tbl>
-              <a:tblPr/>
+              <a:tblPr firstRow="1" bandRow="1"/>
               <a:tblGrid>
                 <a:gridCol w="3108960"/>
                 <a:gridCol w="1554480"/>
@@ -13102,7 +13755,13 @@
       </p:graphicFrame>
       <p:sp>
         <p:nvSpPr>
-          <p:cNvPr id="6" name="Floor box"/>
+          <p:cNvPr id="6" name="Floor box" descr="">
+            <a:extLst>
+              <a:ext uri="{C183D7F6-B498-43B3-948B-1728B52AA6E4}">
+                <adec:decorative xmlns:adec="http://schemas.microsoft.com/office/drawing/2017/decorative" val="1"/>
+              </a:ext>
+            </a:extLst>
+          </p:cNvPr>
           <p:cNvSpPr/>
           <p:nvPr/>
         </p:nvSpPr>
@@ -13136,7 +13795,13 @@
       </p:sp>
       <p:sp>
         <p:nvSpPr>
-          <p:cNvPr id="7" name="Icon FaLaptop"/>
+          <p:cNvPr id="7" name="Icon FaLaptop" descr="">
+            <a:extLst>
+              <a:ext uri="{C183D7F6-B498-43B3-948B-1728B52AA6E4}">
+                <adec:decorative xmlns:adec="http://schemas.microsoft.com/office/drawing/2017/decorative" val="1"/>
+              </a:ext>
+            </a:extLst>
+          </p:cNvPr>
           <p:cNvSpPr/>
           <p:nvPr/>
         </p:nvSpPr>
@@ -13161,7 +13826,13 @@
       </p:sp>
       <p:pic>
         <p:nvPicPr>
-          <p:cNvPr id="8" name="Image 0" descr="C:\Users\whale\git\mwb-b05\presentations\_build\icons\FaLaptop.png">    </p:cNvPr>
+          <p:cNvPr id="8" name="Image 0" descr="">
+            <a:extLst>
+              <a:ext uri="{C183D7F6-B498-43B3-948B-1728B52AA6E4}">
+                <adec:decorative xmlns:adec="http://schemas.microsoft.com/office/drawing/2017/decorative" val="1"/>
+              </a:ext>
+            </a:extLst>
+          </p:cNvPr>
           <p:cNvPicPr>
             <a:picLocks noChangeAspect="1"/>
           </p:cNvPicPr>
@@ -13238,7 +13909,13 @@
       </p:sp>
       <p:sp>
         <p:nvSpPr>
-          <p:cNvPr id="10" name="Estimates"/>
+          <p:cNvPr id="10" name="Estimates" descr="">
+            <a:extLst>
+              <a:ext uri="{C183D7F6-B498-43B3-948B-1728B52AA6E4}">
+                <adec:decorative xmlns:adec="http://schemas.microsoft.com/office/drawing/2017/decorative" val="1"/>
+              </a:ext>
+            </a:extLst>
+          </p:cNvPr>
           <p:cNvSpPr/>
           <p:nvPr/>
         </p:nvSpPr>
@@ -13272,7 +13949,13 @@
       </p:sp>
       <p:sp>
         <p:nvSpPr>
-          <p:cNvPr id="11" name="Icon FaClipboardCheck"/>
+          <p:cNvPr id="11" name="Icon FaClipboardCheck" descr="">
+            <a:extLst>
+              <a:ext uri="{C183D7F6-B498-43B3-948B-1728B52AA6E4}">
+                <adec:decorative xmlns:adec="http://schemas.microsoft.com/office/drawing/2017/decorative" val="1"/>
+              </a:ext>
+            </a:extLst>
+          </p:cNvPr>
           <p:cNvSpPr/>
           <p:nvPr/>
         </p:nvSpPr>
@@ -13297,7 +13980,13 @@
       </p:sp>
       <p:pic>
         <p:nvPicPr>
-          <p:cNvPr id="12" name="Image 1" descr="C:\Users\whale\git\mwb-b05\presentations\_build\icons\FaClipboardCheck.png">    </p:cNvPr>
+          <p:cNvPr id="12" name="Image 1" descr="">
+            <a:extLst>
+              <a:ext uri="{C183D7F6-B498-43B3-948B-1728B52AA6E4}">
+                <adec:decorative xmlns:adec="http://schemas.microsoft.com/office/drawing/2017/decorative" val="1"/>
+              </a:ext>
+            </a:extLst>
+          </p:cNvPr>
           <p:cNvPicPr>
             <a:picLocks noChangeAspect="1"/>
           </p:cNvPicPr>
@@ -13456,9 +14145,9 @@
 </file>
 
 <file path=ppt/theme/theme1.xml><?xml version="1.0" encoding="utf-8"?>
-<a:theme xmlns:a="http://schemas.openxmlformats.org/drawingml/2006/main" name="Modernization Workbook">
+<a:theme xmlns:a="http://schemas.openxmlformats.org/drawingml/2006/main" name="Federal Modernization Workbook">
   <a:themeElements>
-    <a:clrScheme name="Modernization Workbook">
+    <a:clrScheme name="Federal Modernization Workbook">
       <a:dk1>
         <a:srgbClr val="1F2A44"/>
       </a:dk1>
@@ -13496,7 +14185,7 @@
         <a:srgbClr val="334155"/>
       </a:folHlink>
     </a:clrScheme>
-    <a:fontScheme name="Modernization Workbook">
+    <a:fontScheme name="Federal Modernization Workbook">
       <a:majorFont>
         <a:latin typeface="Cambria"/>
         <a:ea typeface=""/>
